--- a/기온에_따른_서울시_따릉이_지하철_분석.pptx
+++ b/기온에_따른_서울시_따릉이_지하철_분석.pptx
@@ -125,7 +125,7 @@
   </p:defaultTextStyle>
   <p:extLst>
     <p:ext uri="{EFAFB233-063F-42B5-8137-9DF3F51BA10A}">
-      <p15:sldGuideLst xmlns="" xmlns:p15="http://schemas.microsoft.com/office/powerpoint/2012/main">
+      <p15:sldGuideLst xmlns:p15="http://schemas.microsoft.com/office/powerpoint/2012/main" xmlns="">
         <p15:guide id="1" orient="horz" pos="2160">
           <p15:clr>
             <a:srgbClr val="A4A3A4"/>
@@ -5268,7 +5268,7 @@
           <p:cNvPr id="10" name="그림 9">
             <a:extLst>
               <a:ext uri="{FF2B5EF4-FFF2-40B4-BE49-F238E27FC236}">
-                <a16:creationId xmlns="" xmlns:a16="http://schemas.microsoft.com/office/drawing/2014/main" id="{A6368D89-AEA0-4256-848F-2DC2A4B61B58}"/>
+                <a16:creationId xmlns:a16="http://schemas.microsoft.com/office/drawing/2014/main" xmlns="" id="{A6368D89-AEA0-4256-848F-2DC2A4B61B58}"/>
               </a:ext>
             </a:extLst>
           </p:cNvPr>
@@ -5298,7 +5298,7 @@
           <p:cNvPr id="11" name="직사각형 10">
             <a:extLst>
               <a:ext uri="{FF2B5EF4-FFF2-40B4-BE49-F238E27FC236}">
-                <a16:creationId xmlns="" xmlns:a16="http://schemas.microsoft.com/office/drawing/2014/main" id="{C6C3163C-F3D1-4BB4-A8E0-8C7F13AFA5A9}"/>
+                <a16:creationId xmlns:a16="http://schemas.microsoft.com/office/drawing/2014/main" xmlns="" id="{C6C3163C-F3D1-4BB4-A8E0-8C7F13AFA5A9}"/>
               </a:ext>
             </a:extLst>
           </p:cNvPr>
@@ -6753,8 +6753,35 @@
                 <a:latin typeface="G마켓 산스 TTF Bold" pitchFamily="2" charset="-127"/>
                 <a:ea typeface="G마켓 산스 TTF Bold" pitchFamily="2" charset="-127"/>
               </a:rPr>
-              <a:t>일 자료만 묶어 상관계수 계사</a:t>
-            </a:r>
+              <a:t>일 자료만 묶어 </a:t>
+            </a:r>
+            <a:r>
+              <a:rPr lang="ko-KR" altLang="en-US" sz="1300">
+                <a:solidFill>
+                  <a:srgbClr val="0F172A"/>
+                </a:solidFill>
+                <a:latin typeface="G마켓 산스 TTF Bold" pitchFamily="2" charset="-127"/>
+                <a:ea typeface="G마켓 산스 TTF Bold" pitchFamily="2" charset="-127"/>
+              </a:rPr>
+              <a:t>상관계수 </a:t>
+            </a:r>
+            <a:r>
+              <a:rPr lang="ko-KR" altLang="en-US" sz="1300" smtClean="0">
+                <a:solidFill>
+                  <a:srgbClr val="0F172A"/>
+                </a:solidFill>
+                <a:latin typeface="G마켓 산스 TTF Bold" pitchFamily="2" charset="-127"/>
+                <a:ea typeface="G마켓 산스 TTF Bold" pitchFamily="2" charset="-127"/>
+              </a:rPr>
+              <a:t>확인</a:t>
+            </a:r>
+            <a:endParaRPr lang="ko-KR" altLang="en-US" sz="1300" dirty="0">
+              <a:solidFill>
+                <a:srgbClr val="0F172A"/>
+              </a:solidFill>
+              <a:latin typeface="G마켓 산스 TTF Bold" pitchFamily="2" charset="-127"/>
+              <a:ea typeface="G마켓 산스 TTF Bold" pitchFamily="2" charset="-127"/>
+            </a:endParaRPr>
           </a:p>
           <a:p>
             <a:pPr>
@@ -6804,7 +6831,7 @@
           <p:cNvPr id="24" name="그림 23">
             <a:extLst>
               <a:ext uri="{FF2B5EF4-FFF2-40B4-BE49-F238E27FC236}">
-                <a16:creationId xmlns="" xmlns:a16="http://schemas.microsoft.com/office/drawing/2014/main" id="{30F03DF6-D37F-4C31-9395-E202BCAF9D95}"/>
+                <a16:creationId xmlns:a16="http://schemas.microsoft.com/office/drawing/2014/main" xmlns="" id="{30F03DF6-D37F-4C31-9395-E202BCAF9D95}"/>
               </a:ext>
             </a:extLst>
           </p:cNvPr>
@@ -6834,7 +6861,7 @@
           <p:cNvPr id="28" name="그림 27">
             <a:extLst>
               <a:ext uri="{FF2B5EF4-FFF2-40B4-BE49-F238E27FC236}">
-                <a16:creationId xmlns="" xmlns:a16="http://schemas.microsoft.com/office/drawing/2014/main" id="{7AF73CD8-822B-4345-BD00-7022BAE1E495}"/>
+                <a16:creationId xmlns:a16="http://schemas.microsoft.com/office/drawing/2014/main" xmlns="" id="{7AF73CD8-822B-4345-BD00-7022BAE1E495}"/>
               </a:ext>
             </a:extLst>
           </p:cNvPr>
@@ -6864,7 +6891,7 @@
           <p:cNvPr id="26" name="그림 25">
             <a:extLst>
               <a:ext uri="{FF2B5EF4-FFF2-40B4-BE49-F238E27FC236}">
-                <a16:creationId xmlns="" xmlns:a16="http://schemas.microsoft.com/office/drawing/2014/main" id="{F6F12FD7-11A5-4C36-AF0F-693451925317}"/>
+                <a16:creationId xmlns:a16="http://schemas.microsoft.com/office/drawing/2014/main" xmlns="" id="{F6F12FD7-11A5-4C36-AF0F-693451925317}"/>
               </a:ext>
             </a:extLst>
           </p:cNvPr>
@@ -7766,7 +7793,7 @@
           <p:cNvPr id="10" name="그림 9">
             <a:extLst>
               <a:ext uri="{FF2B5EF4-FFF2-40B4-BE49-F238E27FC236}">
-                <a16:creationId xmlns="" xmlns:a16="http://schemas.microsoft.com/office/drawing/2014/main" id="{5C306047-7216-418B-A4B4-AE5806767CD6}"/>
+                <a16:creationId xmlns:a16="http://schemas.microsoft.com/office/drawing/2014/main" xmlns="" id="{5C306047-7216-418B-A4B4-AE5806767CD6}"/>
               </a:ext>
             </a:extLst>
           </p:cNvPr>
@@ -7796,7 +7823,7 @@
           <p:cNvPr id="12" name="그림 11">
             <a:extLst>
               <a:ext uri="{FF2B5EF4-FFF2-40B4-BE49-F238E27FC236}">
-                <a16:creationId xmlns="" xmlns:a16="http://schemas.microsoft.com/office/drawing/2014/main" id="{1576F03D-114C-4FAC-9632-816AE16EEFC0}"/>
+                <a16:creationId xmlns:a16="http://schemas.microsoft.com/office/drawing/2014/main" xmlns="" id="{1576F03D-114C-4FAC-9632-816AE16EEFC0}"/>
               </a:ext>
             </a:extLst>
           </p:cNvPr>
@@ -7826,7 +7853,7 @@
           <p:cNvPr id="14" name="그림 13">
             <a:extLst>
               <a:ext uri="{FF2B5EF4-FFF2-40B4-BE49-F238E27FC236}">
-                <a16:creationId xmlns="" xmlns:a16="http://schemas.microsoft.com/office/drawing/2014/main" id="{899AF98E-EE84-44AD-9A78-51B438F0716B}"/>
+                <a16:creationId xmlns:a16="http://schemas.microsoft.com/office/drawing/2014/main" xmlns="" id="{899AF98E-EE84-44AD-9A78-51B438F0716B}"/>
               </a:ext>
             </a:extLst>
           </p:cNvPr>
@@ -8840,7 +8867,7 @@
           <p:cNvPr id="14" name="그림 13">
             <a:extLst>
               <a:ext uri="{FF2B5EF4-FFF2-40B4-BE49-F238E27FC236}">
-                <a16:creationId xmlns="" xmlns:a16="http://schemas.microsoft.com/office/drawing/2014/main" id="{35B603EE-3EA9-4583-ACDD-C2BD235F8C90}"/>
+                <a16:creationId xmlns:a16="http://schemas.microsoft.com/office/drawing/2014/main" xmlns="" id="{35B603EE-3EA9-4583-ACDD-C2BD235F8C90}"/>
               </a:ext>
             </a:extLst>
           </p:cNvPr>
@@ -8884,7 +8911,7 @@
             <p:cNvPr id="12" name="그림 11">
               <a:extLst>
                 <a:ext uri="{FF2B5EF4-FFF2-40B4-BE49-F238E27FC236}">
-                  <a16:creationId xmlns="" xmlns:a16="http://schemas.microsoft.com/office/drawing/2014/main" id="{F31155EF-F50E-4832-BBE1-3E07B8984638}"/>
+                  <a16:creationId xmlns:a16="http://schemas.microsoft.com/office/drawing/2014/main" xmlns="" id="{F31155EF-F50E-4832-BBE1-3E07B8984638}"/>
                 </a:ext>
               </a:extLst>
             </p:cNvPr>
@@ -8914,7 +8941,7 @@
             <p:cNvPr id="13" name="직사각형 12">
               <a:extLst>
                 <a:ext uri="{FF2B5EF4-FFF2-40B4-BE49-F238E27FC236}">
-                  <a16:creationId xmlns="" xmlns:a16="http://schemas.microsoft.com/office/drawing/2014/main" id="{44A04F97-8380-4EC5-B5C8-321735D48ABB}"/>
+                  <a16:creationId xmlns:a16="http://schemas.microsoft.com/office/drawing/2014/main" xmlns="" id="{44A04F97-8380-4EC5-B5C8-321735D48ABB}"/>
                 </a:ext>
               </a:extLst>
             </p:cNvPr>
@@ -8967,7 +8994,7 @@
             <p:cNvPr id="15" name="직사각형 14">
               <a:extLst>
                 <a:ext uri="{FF2B5EF4-FFF2-40B4-BE49-F238E27FC236}">
-                  <a16:creationId xmlns="" xmlns:a16="http://schemas.microsoft.com/office/drawing/2014/main" id="{E89B6BAA-71ED-4DB4-AFD3-E0F738FF31D7}"/>
+                  <a16:creationId xmlns:a16="http://schemas.microsoft.com/office/drawing/2014/main" xmlns="" id="{E89B6BAA-71ED-4DB4-AFD3-E0F738FF31D7}"/>
                 </a:ext>
               </a:extLst>
             </p:cNvPr>
@@ -9849,7 +9876,7 @@
           <p:cNvPr id="10" name="그림 9">
             <a:extLst>
               <a:ext uri="{FF2B5EF4-FFF2-40B4-BE49-F238E27FC236}">
-                <a16:creationId xmlns="" xmlns:a16="http://schemas.microsoft.com/office/drawing/2014/main" id="{A7D3F1F4-08C1-4152-B72D-073AF6535E01}"/>
+                <a16:creationId xmlns:a16="http://schemas.microsoft.com/office/drawing/2014/main" xmlns="" id="{A7D3F1F4-08C1-4152-B72D-073AF6535E01}"/>
               </a:ext>
             </a:extLst>
           </p:cNvPr>
@@ -9879,7 +9906,7 @@
           <p:cNvPr id="12" name="그림 11">
             <a:extLst>
               <a:ext uri="{FF2B5EF4-FFF2-40B4-BE49-F238E27FC236}">
-                <a16:creationId xmlns="" xmlns:a16="http://schemas.microsoft.com/office/drawing/2014/main" id="{F7FC9E07-CDE5-460B-8C20-206F8F942209}"/>
+                <a16:creationId xmlns:a16="http://schemas.microsoft.com/office/drawing/2014/main" xmlns="" id="{F7FC9E07-CDE5-460B-8C20-206F8F942209}"/>
               </a:ext>
             </a:extLst>
           </p:cNvPr>
@@ -18027,7 +18054,7 @@
           <p:cNvPr id="1026" name="Picture 2" descr="Combined logo">
             <a:extLst>
               <a:ext uri="{FF2B5EF4-FFF2-40B4-BE49-F238E27FC236}">
-                <a16:creationId xmlns="" xmlns:a16="http://schemas.microsoft.com/office/drawing/2014/main" id="{D91CF117-8488-4571-90F4-FCD121BF91AA}"/>
+                <a16:creationId xmlns:a16="http://schemas.microsoft.com/office/drawing/2014/main" xmlns="" id="{D91CF117-8488-4571-90F4-FCD121BF91AA}"/>
               </a:ext>
             </a:extLst>
           </p:cNvPr>
@@ -18074,7 +18101,7 @@
           <p:cNvPr id="28" name="그림 27">
             <a:extLst>
               <a:ext uri="{FF2B5EF4-FFF2-40B4-BE49-F238E27FC236}">
-                <a16:creationId xmlns="" xmlns:a16="http://schemas.microsoft.com/office/drawing/2014/main" id="{FACA5CE3-4E73-413A-8B2F-80A4B3573DD8}"/>
+                <a16:creationId xmlns:a16="http://schemas.microsoft.com/office/drawing/2014/main" xmlns="" id="{FACA5CE3-4E73-413A-8B2F-80A4B3573DD8}"/>
               </a:ext>
             </a:extLst>
           </p:cNvPr>
@@ -18104,7 +18131,7 @@
           <p:cNvPr id="1032" name="Picture 8" descr="NumPy - Press kit">
             <a:extLst>
               <a:ext uri="{FF2B5EF4-FFF2-40B4-BE49-F238E27FC236}">
-                <a16:creationId xmlns="" xmlns:a16="http://schemas.microsoft.com/office/drawing/2014/main" id="{810C9FC2-6681-43BB-A59A-9899B4DF4DCE}"/>
+                <a16:creationId xmlns:a16="http://schemas.microsoft.com/office/drawing/2014/main" xmlns="" id="{810C9FC2-6681-43BB-A59A-9899B4DF4DCE}"/>
               </a:ext>
             </a:extLst>
           </p:cNvPr>
@@ -18151,7 +18178,7 @@
           <p:cNvPr id="30" name="그림 29">
             <a:extLst>
               <a:ext uri="{FF2B5EF4-FFF2-40B4-BE49-F238E27FC236}">
-                <a16:creationId xmlns="" xmlns:a16="http://schemas.microsoft.com/office/drawing/2014/main" id="{52AD8C25-E8F4-4400-9CDD-FE990325E717}"/>
+                <a16:creationId xmlns:a16="http://schemas.microsoft.com/office/drawing/2014/main" xmlns="" id="{52AD8C25-E8F4-4400-9CDD-FE990325E717}"/>
               </a:ext>
             </a:extLst>
           </p:cNvPr>
@@ -18181,7 +18208,7 @@
           <p:cNvPr id="33" name="그래픽 32">
             <a:extLst>
               <a:ext uri="{FF2B5EF4-FFF2-40B4-BE49-F238E27FC236}">
-                <a16:creationId xmlns="" xmlns:a16="http://schemas.microsoft.com/office/drawing/2014/main" id="{4DD5442B-D21D-4040-BCCF-F50A9FBE1761}"/>
+                <a16:creationId xmlns:a16="http://schemas.microsoft.com/office/drawing/2014/main" xmlns="" id="{4DD5442B-D21D-4040-BCCF-F50A9FBE1761}"/>
               </a:ext>
             </a:extLst>
           </p:cNvPr>
@@ -18194,7 +18221,7 @@
           <a:blip r:embed="rId6">
             <a:extLst>
               <a:ext uri="{96DAC541-7B7A-43D3-8B79-37D633B846F1}">
-                <asvg:svgBlip xmlns="" xmlns:asvg="http://schemas.microsoft.com/office/drawing/2016/SVG/main" r:embed="rId7"/>
+                <asvg:svgBlip xmlns:asvg="http://schemas.microsoft.com/office/drawing/2016/SVG/main" xmlns="" r:embed="rId7"/>
               </a:ext>
             </a:extLst>
           </a:blip>
@@ -18217,7 +18244,7 @@
           <p:cNvPr id="35" name="그래픽 34">
             <a:extLst>
               <a:ext uri="{FF2B5EF4-FFF2-40B4-BE49-F238E27FC236}">
-                <a16:creationId xmlns="" xmlns:a16="http://schemas.microsoft.com/office/drawing/2014/main" id="{C8B8C14D-D768-4C32-8633-1B74DFC0225B}"/>
+                <a16:creationId xmlns:a16="http://schemas.microsoft.com/office/drawing/2014/main" xmlns="" id="{C8B8C14D-D768-4C32-8633-1B74DFC0225B}"/>
               </a:ext>
             </a:extLst>
           </p:cNvPr>
@@ -18230,7 +18257,7 @@
           <a:blip r:embed="rId8">
             <a:extLst>
               <a:ext uri="{96DAC541-7B7A-43D3-8B79-37D633B846F1}">
-                <asvg:svgBlip xmlns="" xmlns:asvg="http://schemas.microsoft.com/office/drawing/2016/SVG/main" r:embed="rId9"/>
+                <asvg:svgBlip xmlns:asvg="http://schemas.microsoft.com/office/drawing/2016/SVG/main" xmlns="" r:embed="rId9"/>
               </a:ext>
             </a:extLst>
           </a:blip>
@@ -18253,7 +18280,7 @@
           <p:cNvPr id="37" name="그림 36">
             <a:extLst>
               <a:ext uri="{FF2B5EF4-FFF2-40B4-BE49-F238E27FC236}">
-                <a16:creationId xmlns="" xmlns:a16="http://schemas.microsoft.com/office/drawing/2014/main" id="{BCF75F6F-6204-4B48-B619-5BBAA3EE1351}"/>
+                <a16:creationId xmlns:a16="http://schemas.microsoft.com/office/drawing/2014/main" xmlns="" id="{BCF75F6F-6204-4B48-B619-5BBAA3EE1351}"/>
               </a:ext>
             </a:extLst>
           </p:cNvPr>
@@ -18283,7 +18310,7 @@
           <p:cNvPr id="1036" name="Picture 12" descr="Streamlit logo on light background">
             <a:extLst>
               <a:ext uri="{FF2B5EF4-FFF2-40B4-BE49-F238E27FC236}">
-                <a16:creationId xmlns="" xmlns:a16="http://schemas.microsoft.com/office/drawing/2014/main" id="{8298C621-C7B9-4DCD-92CA-3BF7A174C93E}"/>
+                <a16:creationId xmlns:a16="http://schemas.microsoft.com/office/drawing/2014/main" xmlns="" id="{8298C621-C7B9-4DCD-92CA-3BF7A174C93E}"/>
               </a:ext>
             </a:extLst>
           </p:cNvPr>
@@ -19777,7 +19804,27 @@
                 <a:latin typeface="G마켓 산스 TTF Bold" pitchFamily="2" charset="-127"/>
                 <a:ea typeface="G마켓 산스 TTF Bold" pitchFamily="2" charset="-127"/>
               </a:rPr>
-              <a:t> 후 UTF-8-SIG </a:t>
+              <a:t> </a:t>
+            </a:r>
+            <a:r>
+              <a:rPr sz="1300" b="1">
+                <a:solidFill>
+                  <a:srgbClr val="64748B"/>
+                </a:solidFill>
+                <a:latin typeface="G마켓 산스 TTF Bold" pitchFamily="2" charset="-127"/>
+                <a:ea typeface="G마켓 산스 TTF Bold" pitchFamily="2" charset="-127"/>
+              </a:rPr>
+              <a:t>후 </a:t>
+            </a:r>
+            <a:r>
+              <a:rPr sz="1300" b="1" smtClean="0">
+                <a:solidFill>
+                  <a:srgbClr val="64748B"/>
+                </a:solidFill>
+                <a:latin typeface="G마켓 산스 TTF Bold" pitchFamily="2" charset="-127"/>
+                <a:ea typeface="G마켓 산스 TTF Bold" pitchFamily="2" charset="-127"/>
+              </a:rPr>
+              <a:t>UTF-8-SIG </a:t>
             </a:r>
             <a:r>
               <a:rPr sz="1300" b="1" dirty="0" err="1">
@@ -22229,7 +22276,7 @@
           <p:cNvPr id="12" name="그림 11">
             <a:extLst>
               <a:ext uri="{FF2B5EF4-FFF2-40B4-BE49-F238E27FC236}">
-                <a16:creationId xmlns="" xmlns:a16="http://schemas.microsoft.com/office/drawing/2014/main" id="{050CBB75-E3EF-4C2B-915E-F75780EB7770}"/>
+                <a16:creationId xmlns:a16="http://schemas.microsoft.com/office/drawing/2014/main" xmlns="" id="{050CBB75-E3EF-4C2B-915E-F75780EB7770}"/>
               </a:ext>
             </a:extLst>
           </p:cNvPr>
@@ -23480,7 +23527,7 @@
           <p:cNvPr id="10" name="그림 9">
             <a:extLst>
               <a:ext uri="{FF2B5EF4-FFF2-40B4-BE49-F238E27FC236}">
-                <a16:creationId xmlns="" xmlns:a16="http://schemas.microsoft.com/office/drawing/2014/main" id="{02414FB4-C3B6-4688-9FFC-4968983D44C8}"/>
+                <a16:creationId xmlns:a16="http://schemas.microsoft.com/office/drawing/2014/main" xmlns="" id="{02414FB4-C3B6-4688-9FFC-4968983D44C8}"/>
               </a:ext>
             </a:extLst>
           </p:cNvPr>
@@ -23510,7 +23557,7 @@
           <p:cNvPr id="9" name="직사각형 8">
             <a:extLst>
               <a:ext uri="{FF2B5EF4-FFF2-40B4-BE49-F238E27FC236}">
-                <a16:creationId xmlns="" xmlns:a16="http://schemas.microsoft.com/office/drawing/2014/main" id="{9035B26F-D264-4944-8E01-D4F8F0DBCF93}"/>
+                <a16:creationId xmlns:a16="http://schemas.microsoft.com/office/drawing/2014/main" xmlns="" id="{9035B26F-D264-4944-8E01-D4F8F0DBCF93}"/>
               </a:ext>
             </a:extLst>
           </p:cNvPr>
@@ -23563,7 +23610,7 @@
           <p:cNvPr id="11" name="직사각형 10">
             <a:extLst>
               <a:ext uri="{FF2B5EF4-FFF2-40B4-BE49-F238E27FC236}">
-                <a16:creationId xmlns="" xmlns:a16="http://schemas.microsoft.com/office/drawing/2014/main" id="{DE7C8FAB-7A85-4CFB-BAD6-AB929DA312FA}"/>
+                <a16:creationId xmlns:a16="http://schemas.microsoft.com/office/drawing/2014/main" xmlns="" id="{DE7C8FAB-7A85-4CFB-BAD6-AB929DA312FA}"/>
               </a:ext>
             </a:extLst>
           </p:cNvPr>
@@ -24228,7 +24275,7 @@
   <a:extraClrSchemeLst/>
   <a:extLst>
     <a:ext uri="{05A4C25C-085E-4340-85A3-A5531E510DB2}">
-      <thm15:themeFamily xmlns="" xmlns:thm15="http://schemas.microsoft.com/office/thememl/2012/main" name="Office Theme" id="{62F939B6-93AF-4DB8-9C6B-D6C7DFDC589F}" vid="{4A3C46E8-61CC-4603-A589-7422A47A8E4A}"/>
+      <thm15:themeFamily xmlns:thm15="http://schemas.microsoft.com/office/thememl/2012/main" xmlns="" name="Office Theme" id="{62F939B6-93AF-4DB8-9C6B-D6C7DFDC589F}" vid="{4A3C46E8-61CC-4603-A589-7422A47A8E4A}"/>
     </a:ext>
   </a:extLst>
 </a:theme>
